--- a/dist/초5/사회·역사/역사와생활/초5_사회·역사_역사와생활_01_선사시대와고조선_학생용.pptx
+++ b/dist/초5/사회·역사/역사와생활/초5_사회·역사_역사와생활_01_선사시대와고조선_학생용.pptx
@@ -120,13 +120,13 @@
   <p:extLst>
     <p:ext uri="{521415D9-36F7-43E2-AB2F-B90AF26B5E84}">
       <p14:sectionLst xmlns:p14="http://schemas.microsoft.com/office/powerpoint/2010/main">
-        <p14:section name="도입" id="{a672aed6-3c19-3be0-eebd-1b12b1814e95}">
+        <p14:section name="도입" id="{e79151aa-8ed4-0f7d-0b5d-6126d49e291b}">
           <p14:sldIdLst>
             <p14:sldId id="256"/>
             <p14:sldId id="257"/>
           </p14:sldIdLst>
         </p14:section>
-        <p14:section name="개념" id="{5a9518f7-3af6-53fb-636b-445353aa8fb7}">
+        <p14:section name="개념" id="{8d748c63-e5fe-ade7-7edb-9ae8a76967ba}">
           <p14:sldIdLst>
             <p14:sldId id="258"/>
             <p14:sldId id="259"/>
@@ -135,7 +135,7 @@
             <p14:sldId id="265"/>
           </p14:sldIdLst>
         </p14:section>
-        <p14:section name="연습" id="{86cf0ce4-7b64-d661-d039-8631d2b0a9ad}">
+        <p14:section name="연습" id="{3319cc95-6dfc-3f3c-c548-7a97c0e2d268}">
           <p14:sldIdLst>
             <p14:sldId id="261"/>
             <p14:sldId id="262"/>
@@ -143,23 +143,23 @@
             <p14:sldId id="266"/>
           </p14:sldIdLst>
         </p14:section>
-        <p14:section name="개념" id="{e6c65f44-fb02-4b0b-c6ea-5c9a5b056c84}">
+        <p14:section name="개념" id="{94afb707-d5f9-b5b7-c6f4-26c3a53ac12c}">
           <p14:sldIdLst/>
         </p14:section>
-        <p14:section name="연습" id="{84387c7f-e016-2383-c671-1739ea763153}">
+        <p14:section name="연습" id="{475010f1-f9e2-41ff-5ec3-bde82a3dea29}">
           <p14:sldIdLst/>
         </p14:section>
-        <p14:section name="확인" id="{939fb668-b30e-69fe-21f2-2edf45f6aa35}">
+        <p14:section name="확인" id="{78fd8cae-185d-a758-6a8d-a81f192e61cd}">
           <p14:sldIdLst>
             <p14:sldId id="267"/>
           </p14:sldIdLst>
         </p14:section>
-        <p14:section name="정리" id="{89b260db-e3ee-ce25-1536-89880e80c303}">
+        <p14:section name="정리" id="{87a735b1-c654-734a-c38e-042a72aab6cc}">
           <p14:sldIdLst>
             <p14:sldId id="268"/>
           </p14:sldIdLst>
         </p14:section>
-        <p14:section name="보충" id="{adace5a7-7fe3-96bd-5c0b-aa9a79219389}">
+        <p14:section name="보충" id="{8c5cfcf3-bc9d-7ffc-3728-d6cdaae8cbfe}">
           <p14:sldIdLst>
             <p14:sldId id="269"/>
           </p14:sldIdLst>

--- a/dist/초5/사회·역사/역사와생활/초5_사회·역사_역사와생활_01_선사시대와고조선_학생용.pptx
+++ b/dist/초5/사회·역사/역사와생활/초5_사회·역사_역사와생활_01_선사시대와고조선_학생용.pptx
@@ -120,13 +120,13 @@
   <p:extLst>
     <p:ext uri="{521415D9-36F7-43E2-AB2F-B90AF26B5E84}">
       <p14:sectionLst xmlns:p14="http://schemas.microsoft.com/office/powerpoint/2010/main">
-        <p14:section name="도입" id="{e79151aa-8ed4-0f7d-0b5d-6126d49e291b}">
+        <p14:section name="도입" id="{26b24dfc-4fa4-eb6a-df61-47e56f430e61}">
           <p14:sldIdLst>
             <p14:sldId id="256"/>
             <p14:sldId id="257"/>
           </p14:sldIdLst>
         </p14:section>
-        <p14:section name="개념" id="{8d748c63-e5fe-ade7-7edb-9ae8a76967ba}">
+        <p14:section name="개념" id="{465f178a-9663-f513-b871-d058514b9389}">
           <p14:sldIdLst>
             <p14:sldId id="258"/>
             <p14:sldId id="259"/>
@@ -135,7 +135,7 @@
             <p14:sldId id="265"/>
           </p14:sldIdLst>
         </p14:section>
-        <p14:section name="연습" id="{3319cc95-6dfc-3f3c-c548-7a97c0e2d268}">
+        <p14:section name="연습" id="{81ef3357-8c9c-1954-3ae8-f309dc5d3184}">
           <p14:sldIdLst>
             <p14:sldId id="261"/>
             <p14:sldId id="262"/>
@@ -143,23 +143,23 @@
             <p14:sldId id="266"/>
           </p14:sldIdLst>
         </p14:section>
-        <p14:section name="개념" id="{94afb707-d5f9-b5b7-c6f4-26c3a53ac12c}">
+        <p14:section name="개념" id="{9f08d39c-d11e-5604-e16a-f7e59c558517}">
           <p14:sldIdLst/>
         </p14:section>
-        <p14:section name="연습" id="{475010f1-f9e2-41ff-5ec3-bde82a3dea29}">
+        <p14:section name="연습" id="{c9dda9e7-89bc-69de-e552-31bd28f14610}">
           <p14:sldIdLst/>
         </p14:section>
-        <p14:section name="확인" id="{78fd8cae-185d-a758-6a8d-a81f192e61cd}">
+        <p14:section name="확인" id="{b843a970-de07-cfa0-80a4-b966f983e0bd}">
           <p14:sldIdLst>
             <p14:sldId id="267"/>
           </p14:sldIdLst>
         </p14:section>
-        <p14:section name="정리" id="{87a735b1-c654-734a-c38e-042a72aab6cc}">
+        <p14:section name="정리" id="{b1ad07c7-b36a-47e9-414c-a1f34b744675}">
           <p14:sldIdLst>
             <p14:sldId id="268"/>
           </p14:sldIdLst>
         </p14:section>
-        <p14:section name="보충" id="{8c5cfcf3-bc9d-7ffc-3728-d6cdaae8cbfe}">
+        <p14:section name="보충" id="{e1427d5e-088e-107b-c78a-c0474b71a000}">
           <p14:sldIdLst>
             <p14:sldId id="269"/>
           </p14:sldIdLst>

--- a/dist/초5/사회·역사/역사와생활/초5_사회·역사_역사와생활_01_선사시대와고조선_학생용.pptx
+++ b/dist/초5/사회·역사/역사와생활/초5_사회·역사_역사와생활_01_선사시대와고조선_학생용.pptx
@@ -120,13 +120,13 @@
   <p:extLst>
     <p:ext uri="{521415D9-36F7-43E2-AB2F-B90AF26B5E84}">
       <p14:sectionLst xmlns:p14="http://schemas.microsoft.com/office/powerpoint/2010/main">
-        <p14:section name="도입" id="{26b24dfc-4fa4-eb6a-df61-47e56f430e61}">
+        <p14:section name="도입" id="{ffcf2e8e-3bc9-cd9d-a1c9-c0d8ed95e2d7}">
           <p14:sldIdLst>
             <p14:sldId id="256"/>
             <p14:sldId id="257"/>
           </p14:sldIdLst>
         </p14:section>
-        <p14:section name="개념" id="{465f178a-9663-f513-b871-d058514b9389}">
+        <p14:section name="개념" id="{9f280e6c-0075-6f41-4b8e-0285b3cc6a57}">
           <p14:sldIdLst>
             <p14:sldId id="258"/>
             <p14:sldId id="259"/>
@@ -135,7 +135,7 @@
             <p14:sldId id="265"/>
           </p14:sldIdLst>
         </p14:section>
-        <p14:section name="연습" id="{81ef3357-8c9c-1954-3ae8-f309dc5d3184}">
+        <p14:section name="연습" id="{48c09910-15e2-9d0b-67e3-e328538c6f1f}">
           <p14:sldIdLst>
             <p14:sldId id="261"/>
             <p14:sldId id="262"/>
@@ -143,23 +143,23 @@
             <p14:sldId id="266"/>
           </p14:sldIdLst>
         </p14:section>
-        <p14:section name="개념" id="{9f08d39c-d11e-5604-e16a-f7e59c558517}">
+        <p14:section name="개념" id="{5fc682fb-6897-45bb-dac2-06918333f212}">
           <p14:sldIdLst/>
         </p14:section>
-        <p14:section name="연습" id="{c9dda9e7-89bc-69de-e552-31bd28f14610}">
+        <p14:section name="연습" id="{4a12dd27-b87c-f5f6-4ab2-d9234b036798}">
           <p14:sldIdLst/>
         </p14:section>
-        <p14:section name="확인" id="{b843a970-de07-cfa0-80a4-b966f983e0bd}">
+        <p14:section name="확인" id="{0fd28059-68ee-920c-9726-222920855f23}">
           <p14:sldIdLst>
             <p14:sldId id="267"/>
           </p14:sldIdLst>
         </p14:section>
-        <p14:section name="정리" id="{b1ad07c7-b36a-47e9-414c-a1f34b744675}">
+        <p14:section name="정리" id="{7912829d-7acd-3442-1843-bd7576ab9ac2}">
           <p14:sldIdLst>
             <p14:sldId id="268"/>
           </p14:sldIdLst>
         </p14:section>
-        <p14:section name="보충" id="{e1427d5e-088e-107b-c78a-c0474b71a000}">
+        <p14:section name="보충" id="{241bf02c-e2a6-df45-6c15-3f138a8ab355}">
           <p14:sldIdLst>
             <p14:sldId id="269"/>
           </p14:sldIdLst>
@@ -11129,6 +11129,7 @@
               <a:srgbClr val="1F2937"/>
             </a:solidFill>
             <a:prstDash val="solid"/>
+            <a:tailEnd type="triangle"/>
           </a:ln>
         </p:spPr>
       </p:sp>
@@ -11152,6 +11153,7 @@
               <a:srgbClr val="1F2937"/>
             </a:solidFill>
             <a:prstDash val="solid"/>
+            <a:tailEnd type="triangle"/>
           </a:ln>
         </p:spPr>
       </p:sp>
